--- a/labs/lab1/docs/lab1-hls-bringup.pptx
+++ b/labs/lab1/docs/lab1-hls-bringup.pptx
@@ -4369,7 +4369,7 @@
         <p:spPr>
           <a:xfrm>
             <a:off x="566928" y="3163824"/>
-            <a:ext cx="11057839" cy="731520"/>
+            <a:ext cx="11057839" cy="1042416"/>
           </a:xfrm>
           <a:prstGeom prst="rect">
             <a:avLst/>
@@ -4410,84 +4410,22 @@
                 </a:solidFill>
                 <a:latin typeface="Arial"/>
               </a:rPr>
-              <a:t>▪  Without #pragma HLS PIPELINE II=1 the tool spreads the body over ~35 cycles.</a:t>
-            </a:r>
-          </a:p>
-        </p:txBody>
-      </p:sp>
-      <p:sp>
-        <p:nvSpPr>
-          <p:cNvPr id="7" name="TextBox 6"/>
-          <p:cNvSpPr txBox="1"/>
-          <p:nvPr/>
-        </p:nvSpPr>
-        <p:spPr>
-          <a:xfrm>
-            <a:off x="566928" y="4023360"/>
-            <a:ext cx="11057839" cy="329184"/>
-          </a:xfrm>
-          <a:prstGeom prst="rect">
-            <a:avLst/>
-          </a:prstGeom>
-          <a:noFill/>
-        </p:spPr>
-        <p:txBody>
-          <a:bodyPr wrap="square">
-            <a:spAutoFit/>
-          </a:bodyPr>
-          <a:lstStyle/>
-          <a:p>
-            <a:pPr>
-              <a:spcAft>
-                <a:spcPts val="600"/>
-              </a:spcAft>
-            </a:pPr>
-            <a:r>
-              <a:rPr sz="1300" b="0">
+              <a:t>▪  Without #pragma HLS PIPELINE II=1 the tool spreads the body over ~35 cycles. The scan then runs 35× too slowly and the display flickers visibly.</a:t>
+            </a:r>
+          </a:p>
+          <a:p>
+            <a:pPr>
+              <a:spcAft>
+                <a:spcPts val="700"/>
+              </a:spcAft>
+            </a:pPr>
+            <a:r>
+              <a:rPr sz="1400">
                 <a:solidFill>
                   <a:srgbClr val="222222"/>
                 </a:solidFill>
                 <a:latin typeface="Arial"/>
               </a:rPr>
-              <a:t>The scan then runs 35× too slowly and the display flickers visibly.</a:t>
-            </a:r>
-          </a:p>
-        </p:txBody>
-      </p:sp>
-      <p:sp>
-        <p:nvSpPr>
-          <p:cNvPr id="8" name="TextBox 7"/>
-          <p:cNvSpPr txBox="1"/>
-          <p:nvPr/>
-        </p:nvSpPr>
-        <p:spPr>
-          <a:xfrm>
-            <a:off x="566928" y="4425696"/>
-            <a:ext cx="11057839" cy="420624"/>
-          </a:xfrm>
-          <a:prstGeom prst="rect">
-            <a:avLst/>
-          </a:prstGeom>
-          <a:noFill/>
-        </p:spPr>
-        <p:txBody>
-          <a:bodyPr wrap="square">
-            <a:spAutoFit/>
-          </a:bodyPr>
-          <a:lstStyle/>
-          <a:p>
-            <a:pPr>
-              <a:spcAft>
-                <a:spcPts val="700"/>
-              </a:spcAft>
-            </a:pPr>
-            <a:r>
-              <a:rPr sz="1400">
-                <a:solidFill>
-                  <a:srgbClr val="222222"/>
-                </a:solidFill>
-                <a:latin typeface="Arial"/>
-              </a:rPr>
               <a:t>▪  Also check: estimated clock under 20 ns, and no BRAM or DSP for a decoder.</a:t>
             </a:r>
           </a:p>
@@ -4495,13 +4433,13 @@
       </p:sp>
       <p:sp>
         <p:nvSpPr>
-          <p:cNvPr id="9" name="Rounded Rectangle 8"/>
+          <p:cNvPr id="7" name="Rounded Rectangle 6"/>
           <p:cNvSpPr/>
           <p:nvPr/>
         </p:nvSpPr>
         <p:spPr>
           <a:xfrm>
-            <a:off x="566928" y="4974336"/>
+            <a:off x="566928" y="4334256"/>
             <a:ext cx="11057839" cy="786384"/>
           </a:xfrm>
           <a:prstGeom prst="roundRect">
@@ -4543,13 +4481,13 @@
       </p:sp>
       <p:sp>
         <p:nvSpPr>
-          <p:cNvPr id="10" name="TextBox 9"/>
+          <p:cNvPr id="8" name="TextBox 7"/>
           <p:cNvSpPr txBox="1"/>
           <p:nvPr/>
         </p:nvSpPr>
         <p:spPr>
           <a:xfrm>
-            <a:off x="731520" y="5056632"/>
+            <a:off x="731520" y="4416552"/>
             <a:ext cx="10728655" cy="621792"/>
           </a:xfrm>
           <a:prstGeom prst="rect">
@@ -4582,7 +4520,7 @@
       </p:sp>
       <p:sp>
         <p:nvSpPr>
-          <p:cNvPr id="11" name="TextBox 10"/>
+          <p:cNvPr id="9" name="TextBox 8"/>
           <p:cNvSpPr txBox="1"/>
           <p:nvPr/>
         </p:nvSpPr>
@@ -4845,7 +4783,7 @@
         <p:spPr>
           <a:xfrm>
             <a:off x="566928" y="3163824"/>
-            <a:ext cx="11057839" cy="731520"/>
+            <a:ext cx="11057839" cy="1042416"/>
           </a:xfrm>
           <a:prstGeom prst="rect">
             <a:avLst/>
@@ -4886,7 +4824,23 @@
                 </a:solidFill>
                 <a:latin typeface="Arial"/>
               </a:rPr>
-              <a:t>▪  Verify afterwards that solution1/impl/export.zip and</a:t>
+              <a:t>▪  Verify afterwards that solution1/impl/export.zip and solution1/impl/ip/component.xml exist.</a:t>
+            </a:r>
+          </a:p>
+          <a:p>
+            <a:pPr>
+              <a:spcAft>
+                <a:spcPts val="700"/>
+              </a:spcAft>
+            </a:pPr>
+            <a:r>
+              <a:rPr sz="1400">
+                <a:solidFill>
+                  <a:srgbClr val="222222"/>
+                </a:solidFill>
+                <a:latin typeface="Arial"/>
+              </a:rPr>
+              <a:t>▪  This exported IP is exactly what Lab 2 imports into a Vivado block design.</a:t>
             </a:r>
           </a:p>
         </p:txBody>
@@ -4894,84 +4848,6 @@
       <p:sp>
         <p:nvSpPr>
           <p:cNvPr id="7" name="TextBox 6"/>
-          <p:cNvSpPr txBox="1"/>
-          <p:nvPr/>
-        </p:nvSpPr>
-        <p:spPr>
-          <a:xfrm>
-            <a:off x="566928" y="4023360"/>
-            <a:ext cx="11057839" cy="329184"/>
-          </a:xfrm>
-          <a:prstGeom prst="rect">
-            <a:avLst/>
-          </a:prstGeom>
-          <a:noFill/>
-        </p:spPr>
-        <p:txBody>
-          <a:bodyPr wrap="square">
-            <a:spAutoFit/>
-          </a:bodyPr>
-          <a:lstStyle/>
-          <a:p>
-            <a:pPr>
-              <a:spcAft>
-                <a:spcPts val="600"/>
-              </a:spcAft>
-            </a:pPr>
-            <a:r>
-              <a:rPr sz="1300" b="0">
-                <a:solidFill>
-                  <a:srgbClr val="222222"/>
-                </a:solidFill>
-                <a:latin typeface="Arial"/>
-              </a:rPr>
-              <a:t>solution1/impl/ip/component.xml exist.</a:t>
-            </a:r>
-          </a:p>
-        </p:txBody>
-      </p:sp>
-      <p:sp>
-        <p:nvSpPr>
-          <p:cNvPr id="8" name="TextBox 7"/>
-          <p:cNvSpPr txBox="1"/>
-          <p:nvPr/>
-        </p:nvSpPr>
-        <p:spPr>
-          <a:xfrm>
-            <a:off x="566928" y="4425696"/>
-            <a:ext cx="11057839" cy="420624"/>
-          </a:xfrm>
-          <a:prstGeom prst="rect">
-            <a:avLst/>
-          </a:prstGeom>
-          <a:noFill/>
-        </p:spPr>
-        <p:txBody>
-          <a:bodyPr wrap="square">
-            <a:spAutoFit/>
-          </a:bodyPr>
-          <a:lstStyle/>
-          <a:p>
-            <a:pPr>
-              <a:spcAft>
-                <a:spcPts val="700"/>
-              </a:spcAft>
-            </a:pPr>
-            <a:r>
-              <a:rPr sz="1400">
-                <a:solidFill>
-                  <a:srgbClr val="222222"/>
-                </a:solidFill>
-                <a:latin typeface="Arial"/>
-              </a:rPr>
-              <a:t>▪  This exported IP is exactly what Lab 2 imports into a Vivado block design.</a:t>
-            </a:r>
-          </a:p>
-        </p:txBody>
-      </p:sp>
-      <p:sp>
-        <p:nvSpPr>
-          <p:cNvPr id="9" name="TextBox 8"/>
           <p:cNvSpPr txBox="1"/>
           <p:nvPr/>
         </p:nvSpPr>
@@ -9200,7 +9076,7 @@
         <p:spPr>
           <a:xfrm>
             <a:off x="566928" y="3031236"/>
-            <a:ext cx="11057839" cy="420624"/>
+            <a:ext cx="11057839" cy="731520"/>
           </a:xfrm>
           <a:prstGeom prst="rect">
             <a:avLst/>
@@ -9225,84 +9101,22 @@
                 </a:solidFill>
                 <a:latin typeface="Arial"/>
               </a:rPr>
-              <a:t>▪  To observe a full scan it calls the function ~200 000 times and records which</a:t>
-            </a:r>
-          </a:p>
-        </p:txBody>
-      </p:sp>
-      <p:sp>
-        <p:nvSpPr>
-          <p:cNvPr id="8" name="TextBox 7"/>
-          <p:cNvSpPr txBox="1"/>
-          <p:nvPr/>
-        </p:nvSpPr>
-        <p:spPr>
-          <a:xfrm>
-            <a:off x="566928" y="3579876"/>
-            <a:ext cx="11057839" cy="329184"/>
-          </a:xfrm>
-          <a:prstGeom prst="rect">
-            <a:avLst/>
-          </a:prstGeom>
-          <a:noFill/>
-        </p:spPr>
-        <p:txBody>
-          <a:bodyPr wrap="square">
-            <a:spAutoFit/>
-          </a:bodyPr>
-          <a:lstStyle/>
-          <a:p>
-            <a:pPr>
-              <a:spcAft>
-                <a:spcPts val="600"/>
-              </a:spcAft>
-            </a:pPr>
-            <a:r>
-              <a:rPr sz="1300" b="0">
+              <a:t>▪  To observe a full scan it calls the function ~200 000 times and records which pattern each anode received.</a:t>
+            </a:r>
+          </a:p>
+          <a:p>
+            <a:pPr>
+              <a:spcAft>
+                <a:spcPts val="700"/>
+              </a:spcAft>
+            </a:pPr>
+            <a:r>
+              <a:rPr sz="1400">
                 <a:solidFill>
                   <a:srgbClr val="222222"/>
                 </a:solidFill>
                 <a:latin typeface="Arial"/>
               </a:rPr>
-              <a:t>pattern each anode received.</a:t>
-            </a:r>
-          </a:p>
-        </p:txBody>
-      </p:sp>
-      <p:sp>
-        <p:nvSpPr>
-          <p:cNvPr id="9" name="TextBox 8"/>
-          <p:cNvSpPr txBox="1"/>
-          <p:nvPr/>
-        </p:nvSpPr>
-        <p:spPr>
-          <a:xfrm>
-            <a:off x="566928" y="3982212"/>
-            <a:ext cx="11057839" cy="420624"/>
-          </a:xfrm>
-          <a:prstGeom prst="rect">
-            <a:avLst/>
-          </a:prstGeom>
-          <a:noFill/>
-        </p:spPr>
-        <p:txBody>
-          <a:bodyPr wrap="square">
-            <a:spAutoFit/>
-          </a:bodyPr>
-          <a:lstStyle/>
-          <a:p>
-            <a:pPr>
-              <a:spcAft>
-                <a:spcPts val="700"/>
-              </a:spcAft>
-            </a:pPr>
-            <a:r>
-              <a:rPr sz="1400">
-                <a:solidFill>
-                  <a:srgbClr val="222222"/>
-                </a:solidFill>
-                <a:latin typeface="Arial"/>
-              </a:rPr>
               <a:t>▪  It also asserts that exactly one anode is active in every single cycle.</a:t>
             </a:r>
           </a:p>
@@ -9310,13 +9124,13 @@
       </p:sp>
       <p:sp>
         <p:nvSpPr>
-          <p:cNvPr id="10" name="Rounded Rectangle 9"/>
+          <p:cNvPr id="8" name="Rounded Rectangle 7"/>
           <p:cNvSpPr/>
           <p:nvPr/>
         </p:nvSpPr>
         <p:spPr>
           <a:xfrm>
-            <a:off x="566928" y="4530852"/>
+            <a:off x="566928" y="3890772"/>
             <a:ext cx="11057839" cy="512064"/>
           </a:xfrm>
           <a:prstGeom prst="roundRect">
@@ -9358,13 +9172,13 @@
       </p:sp>
       <p:sp>
         <p:nvSpPr>
-          <p:cNvPr id="11" name="TextBox 10"/>
+          <p:cNvPr id="9" name="TextBox 8"/>
           <p:cNvSpPr txBox="1"/>
           <p:nvPr/>
         </p:nvSpPr>
         <p:spPr>
           <a:xfrm>
-            <a:off x="731520" y="4613148"/>
+            <a:off x="731520" y="3973068"/>
             <a:ext cx="10728655" cy="347472"/>
           </a:xfrm>
           <a:prstGeom prst="rect">
@@ -9397,7 +9211,7 @@
       </p:sp>
       <p:sp>
         <p:nvSpPr>
-          <p:cNvPr id="12" name="TextBox 11"/>
+          <p:cNvPr id="10" name="TextBox 9"/>
           <p:cNvSpPr txBox="1"/>
           <p:nvPr/>
         </p:nvSpPr>
